--- a/curso/pptx/S64.pptx
+++ b/curso/pptx/S64.pptx
@@ -7024,7 +7024,7 @@
                 </a:solidFill>
                 <a:latin typeface="Nunito Sans"/>
               </a:rPr>
-              <a:t>La gente del andén del metro es un montón</a:t>
+              <a:t>地铁站台上的人是一堆人</a:t>
             </a:r>
           </a:p>
           <a:p>
@@ -7049,7 +7049,7 @@
                 </a:solidFill>
                 <a:latin typeface="Nunito Sans"/>
               </a:rPr>
-              <a:t>Un equipo de fútbol es un grupo</a:t>
+              <a:t>一支足球队是一个群体</a:t>
             </a:r>
           </a:p>
           <a:p>
@@ -7074,7 +7074,7 @@
                 </a:solidFill>
                 <a:latin typeface="Nunito Sans"/>
               </a:rPr>
-              <a:t>Entre los dos hay grados: no es todo o nada</a:t>
+              <a:t>两者之间有不同的程度：不是非此即彼</a:t>
             </a:r>
           </a:p>
         </p:txBody>
@@ -7226,7 +7226,7 @@
                 </a:solidFill>
                 <a:latin typeface="Nunito Sans"/>
               </a:rPr>
-              <a:t>Se relacionan:</a:t>
+              <a:t>相互往来：</a:t>
             </a:r>
             <a:r>
               <a:rPr sz="2800" b="0">
@@ -7235,7 +7235,7 @@
                 </a:solidFill>
                 <a:latin typeface="Nunito Sans"/>
               </a:rPr>
-              <a:t> se conocen y hablan entre ellos</a:t>
+              <a:t>互相认识，彼此交谈</a:t>
             </a:r>
           </a:p>
           <a:p>
@@ -7260,7 +7260,7 @@
                 </a:solidFill>
                 <a:latin typeface="Nunito Sans"/>
               </a:rPr>
-              <a:t>Objetivo común:</a:t>
+              <a:t>共同目标：</a:t>
             </a:r>
             <a:r>
               <a:rPr sz="2800" b="0">
@@ -7269,7 +7269,7 @@
                 </a:solidFill>
                 <a:latin typeface="Nunito Sans"/>
               </a:rPr>
-              <a:t> quieren conseguir algo juntos</a:t>
+              <a:t>想一起实现某件事</a:t>
             </a:r>
           </a:p>
           <a:p>
@@ -7294,7 +7294,7 @@
                 </a:solidFill>
                 <a:latin typeface="Nunito Sans"/>
               </a:rPr>
-              <a:t>Normas:</a:t>
+              <a:t>规范：</a:t>
             </a:r>
             <a:r>
               <a:rPr sz="2800" b="0">
@@ -7303,7 +7303,7 @@
                 </a:solidFill>
                 <a:latin typeface="Nunito Sans"/>
               </a:rPr>
-              <a:t> tienen reglas, escritas o no</a:t>
+              <a:t>有规则，成文的或不成文的</a:t>
             </a:r>
           </a:p>
           <a:p>
@@ -7328,7 +7328,7 @@
                 </a:solidFill>
                 <a:latin typeface="Nunito Sans"/>
               </a:rPr>
-              <a:t>Roles:</a:t>
+              <a:t>角色：</a:t>
             </a:r>
             <a:r>
               <a:rPr sz="2800" b="0">
@@ -7337,7 +7337,7 @@
                 </a:solidFill>
                 <a:latin typeface="Nunito Sans"/>
               </a:rPr>
-              <a:t> cada uno tiene su papel</a:t>
+              <a:t>每个人有自己的角色</a:t>
             </a:r>
           </a:p>
           <a:p>
@@ -7362,7 +7362,7 @@
                 </a:solidFill>
                 <a:latin typeface="Nunito Sans"/>
               </a:rPr>
-              <a:t>Nosotros:</a:t>
+              <a:t>我们：</a:t>
             </a:r>
             <a:r>
               <a:rPr sz="2800" b="0">
@@ -7371,7 +7371,7 @@
                 </a:solidFill>
                 <a:latin typeface="Nunito Sans"/>
               </a:rPr>
-              <a:t> se sienten parte del grupo</a:t>
+              <a:t>觉得自己是群体的一部分</a:t>
             </a:r>
           </a:p>
         </p:txBody>
@@ -7632,7 +7632,7 @@
                 </a:solidFill>
                 <a:latin typeface="Nunito Sans"/>
               </a:rPr>
-              <a:t>Norma escrita: el reglamento del equipo</a:t>
+              <a:t>成文的规范：球队的章程</a:t>
             </a:r>
           </a:p>
           <a:p>
@@ -7657,7 +7657,7 @@
                 </a:solidFill>
                 <a:latin typeface="Nunito Sans"/>
               </a:rPr>
-              <a:t>Norma no escrita: avisar si no vas a venir</a:t>
+              <a:t>不成文的规范：不来的话要提前告知</a:t>
             </a:r>
           </a:p>
           <a:p>
@@ -7682,7 +7682,7 @@
                 </a:solidFill>
                 <a:latin typeface="Nunito Sans"/>
               </a:rPr>
-              <a:t>Roles: la capitana, el portero, la que organiza los planes</a:t>
+              <a:t>角色：队长、守门员、负责安排活动的人</a:t>
             </a:r>
           </a:p>
         </p:txBody>

--- a/curso/pptx/S64.pptx
+++ b/curso/pptx/S64.pptx
@@ -4355,7 +4355,7 @@
                 </a:solidFill>
                 <a:latin typeface="Fredoka"/>
               </a:rPr>
-              <a:t>案例2 · 娜亚拉的朋友圈</a:t>
+              <a:t>案例2 · 一个女孩的朋友圈</a:t>
             </a:r>
           </a:p>
         </p:txBody>
@@ -4437,7 +4437,7 @@
                 </a:solidFill>
                 <a:latin typeface="Nunito Sans"/>
               </a:rPr>
-              <a:t>娜亚拉和五个朋友每周六碰面。雅斯敏负责安排活动。她们有一条规矩：在朋友圈里说的事不能传出去。</a:t>
+              <a:t>一个女孩和五个朋友每周六碰面。另一个女孩负责安排活动。她们有一条规矩：在朋友圈里说的事不能传出去。</a:t>
             </a:r>
           </a:p>
         </p:txBody>
@@ -4535,7 +4535,7 @@
                 </a:solidFill>
                 <a:latin typeface="Nunito Sans"/>
               </a:rPr>
-              <a:t>规范和角色？有：一条不成文的规范，雅斯敏担任安排活动的角色。</a:t>
+              <a:t>规范和角色？有：一条不成文的规范，另一个女孩担任安排活动的角色。</a:t>
             </a:r>
           </a:p>
           <a:p>
@@ -5055,7 +5055,7 @@
                 </a:solidFill>
                 <a:latin typeface="Nunito Sans"/>
               </a:rPr>
-              <a:t>奥马尔、陈和另外四个人，两年来每天下午一起玩网游。他们从没当面见过面。</a:t>
+              <a:t>一个男孩、一个同学和另外四个人，两年来每天下午一起玩网游。他们从没当面见过面。</a:t>
             </a:r>
           </a:p>
         </p:txBody>
@@ -5153,7 +5153,7 @@
                 </a:solidFill>
                 <a:latin typeface="Nunito Sans"/>
               </a:rPr>
-              <a:t>但他们每天都往来，想一起获胜，有规范和角色：陈是负责治疗的。</a:t>
+              <a:t>但他们每天都往来，想一起获胜，有规范和角色：那个同学是负责治疗的。</a:t>
             </a:r>
           </a:p>
           <a:p>
